--- a/output/reports/mock_exam_insight_teacher_briefing.pptx
+++ b/output/reports/mock_exam_insight_teacher_briefing.pptx
@@ -176,9 +176,9 @@
           </c:marker>
           <c:cat>
             <c:strRef>
-              <c:f>Sheet1!$A$2:$A$10</c:f>
+              <c:f>Sheet1!$A$2:$A$11</c:f>
               <c:strCache>
-                <c:ptCount val="9"/>
+                <c:ptCount val="10"/>
                 <c:pt idx="0">
                   <c:v>3월</c:v>
                 </c:pt>
@@ -198,12 +198,15 @@
                   <c:v>8월</c:v>
                 </c:pt>
                 <c:pt idx="6">
-                  <c:v>9월</c:v>
+                  <c:v>9월(사)</c:v>
                 </c:pt>
                 <c:pt idx="7">
+                  <c:v>9월(평)</c:v>
+                </c:pt>
+                <c:pt idx="8">
                   <c:v>10월</c:v>
                 </c:pt>
-                <c:pt idx="8">
+                <c:pt idx="9">
                   <c:v>11월</c:v>
                 </c:pt>
               </c:strCache>
@@ -211,10 +214,10 @@
           </c:cat>
           <c:val>
             <c:numRef>
-              <c:f>Sheet1!$B$2:$B$10</c:f>
+              <c:f>Sheet1!$B$2:$B$11</c:f>
               <c:numCache>
                 <c:formatCode>General</c:formatCode>
-                <c:ptCount val="9"/>
+                <c:ptCount val="10"/>
                 <c:pt idx="0">
                   <c:v>89.0</c:v>
                 </c:pt>
@@ -234,12 +237,15 @@
                   <c:v>90.4</c:v>
                 </c:pt>
                 <c:pt idx="6">
-                  <c:v>92.4</c:v>
+                  <c:v>92.7</c:v>
                 </c:pt>
                 <c:pt idx="7">
+                  <c:v>92.2</c:v>
+                </c:pt>
+                <c:pt idx="8">
                   <c:v>91.5</c:v>
                 </c:pt>
-                <c:pt idx="8">
+                <c:pt idx="9">
                   <c:v>91.9</c:v>
                 </c:pt>
               </c:numCache>
@@ -277,9 +283,9 @@
           </c:marker>
           <c:cat>
             <c:strRef>
-              <c:f>Sheet1!$A$2:$A$10</c:f>
+              <c:f>Sheet1!$A$2:$A$11</c:f>
               <c:strCache>
-                <c:ptCount val="9"/>
+                <c:ptCount val="10"/>
                 <c:pt idx="0">
                   <c:v>3월</c:v>
                 </c:pt>
@@ -299,12 +305,15 @@
                   <c:v>8월</c:v>
                 </c:pt>
                 <c:pt idx="6">
-                  <c:v>9월</c:v>
+                  <c:v>9월(사)</c:v>
                 </c:pt>
                 <c:pt idx="7">
+                  <c:v>9월(평)</c:v>
+                </c:pt>
+                <c:pt idx="8">
                   <c:v>10월</c:v>
                 </c:pt>
-                <c:pt idx="8">
+                <c:pt idx="9">
                   <c:v>11월</c:v>
                 </c:pt>
               </c:strCache>
@@ -312,10 +321,10 @@
           </c:cat>
           <c:val>
             <c:numRef>
-              <c:f>Sheet1!$C$2:$C$10</c:f>
+              <c:f>Sheet1!$C$2:$C$11</c:f>
               <c:numCache>
                 <c:formatCode>General</c:formatCode>
-                <c:ptCount val="9"/>
+                <c:ptCount val="10"/>
                 <c:pt idx="0">
                   <c:v>76.5</c:v>
                 </c:pt>
@@ -335,12 +344,15 @@
                   <c:v>78.7</c:v>
                 </c:pt>
                 <c:pt idx="6">
-                  <c:v>79.5</c:v>
+                  <c:v>79.4</c:v>
                 </c:pt>
                 <c:pt idx="7">
+                  <c:v>79.7</c:v>
+                </c:pt>
+                <c:pt idx="8">
                   <c:v>81.1</c:v>
                 </c:pt>
-                <c:pt idx="8">
+                <c:pt idx="9">
                   <c:v>81.0</c:v>
                 </c:pt>
               </c:numCache>
@@ -378,9 +390,9 @@
           </c:marker>
           <c:cat>
             <c:strRef>
-              <c:f>Sheet1!$A$2:$A$10</c:f>
+              <c:f>Sheet1!$A$2:$A$11</c:f>
               <c:strCache>
-                <c:ptCount val="9"/>
+                <c:ptCount val="10"/>
                 <c:pt idx="0">
                   <c:v>3월</c:v>
                 </c:pt>
@@ -400,12 +412,15 @@
                   <c:v>8월</c:v>
                 </c:pt>
                 <c:pt idx="6">
-                  <c:v>9월</c:v>
+                  <c:v>9월(사)</c:v>
                 </c:pt>
                 <c:pt idx="7">
+                  <c:v>9월(평)</c:v>
+                </c:pt>
+                <c:pt idx="8">
                   <c:v>10월</c:v>
                 </c:pt>
-                <c:pt idx="8">
+                <c:pt idx="9">
                   <c:v>11월</c:v>
                 </c:pt>
               </c:strCache>
@@ -413,10 +428,10 @@
           </c:cat>
           <c:val>
             <c:numRef>
-              <c:f>Sheet1!$D$2:$D$10</c:f>
+              <c:f>Sheet1!$D$2:$D$11</c:f>
               <c:numCache>
                 <c:formatCode>General</c:formatCode>
-                <c:ptCount val="9"/>
+                <c:ptCount val="10"/>
                 <c:pt idx="0">
                   <c:v>62.3</c:v>
                 </c:pt>
@@ -439,9 +454,12 @@
                   <c:v>63.6</c:v>
                 </c:pt>
                 <c:pt idx="7">
+                  <c:v>63.5</c:v>
+                </c:pt>
+                <c:pt idx="8">
                   <c:v>63.4</c:v>
                 </c:pt>
-                <c:pt idx="8">
+                <c:pt idx="9">
                   <c:v>63.5</c:v>
                 </c:pt>
               </c:numCache>
@@ -5488,7 +5506,23 @@
               </a:defRPr>
             </a:pPr>
             <a:r>
-              <a:t>분석 대상: 수능 이전 모의고사 기록과 수능 결과가 모두 있는 116명</a:t>
+              <a:t>데이터 출처: 공개용 더미(데모) · 전체 180명 · 수능결과 137명 · 분석 커버리지 137/180명 · 생성 2026-07-07T00:08:42</a:t>
+            </a:r>
+          </a:p>
+          <a:p>
+            <a:pPr>
+              <a:spcAft>
+                <a:spcPts val="800"/>
+              </a:spcAft>
+              <a:defRPr sz="1600">
+                <a:solidFill>
+                  <a:srgbClr val="374151"/>
+                </a:solidFill>
+                <a:latin typeface="Malgun Gothic"/>
+              </a:defRPr>
+            </a:pPr>
+            <a:r>
+              <a:t>분석 대상: 수능 이전 모의고사 기록과 수능 결과가 모두 있는 137명</a:t>
             </a:r>
           </a:p>
           <a:p>
@@ -8782,7 +8816,7 @@
                 <a:gridCol w="1088136"/>
                 <a:gridCol w="1088136"/>
               </a:tblGrid>
-              <a:tr h="510540">
+              <a:tr h="437605">
                 <a:tc>
                   <a:txBody>
                     <a:bodyPr/>
@@ -8904,7 +8938,7 @@
                   </a:tcPr>
                 </a:tc>
               </a:tr>
-              <a:tr h="510540">
+              <a:tr h="437605">
                 <a:tc>
                   <a:txBody>
                     <a:bodyPr/>
@@ -9006,7 +9040,7 @@
                   <a:tcPr/>
                 </a:tc>
               </a:tr>
-              <a:tr h="510540">
+              <a:tr h="437605">
                 <a:tc>
                   <a:txBody>
                     <a:bodyPr/>
@@ -9108,7 +9142,7 @@
                   <a:tcPr/>
                 </a:tc>
               </a:tr>
-              <a:tr h="510540">
+              <a:tr h="437605">
                 <a:tc>
                   <a:txBody>
                     <a:bodyPr/>
@@ -9123,7 +9157,7 @@
                         </a:defRPr>
                       </a:pPr>
                       <a:r>
-                        <a:t>9월</a:t>
+                        <a:t>9월(사)</a:t>
                       </a:r>
                     </a:p>
                   </a:txBody>
@@ -9143,7 +9177,7 @@
                         </a:defRPr>
                       </a:pPr>
                       <a:r>
-                        <a:t>9</a:t>
+                        <a:t>5</a:t>
                       </a:r>
                     </a:p>
                   </a:txBody>
@@ -9163,7 +9197,7 @@
                         </a:defRPr>
                       </a:pPr>
                       <a:r>
-                        <a:t>3.6</a:t>
+                        <a:t>1.1</a:t>
                       </a:r>
                     </a:p>
                   </a:txBody>
@@ -9183,7 +9217,7 @@
                         </a:defRPr>
                       </a:pPr>
                       <a:r>
-                        <a:t>6.2</a:t>
+                        <a:t>2.0</a:t>
                       </a:r>
                     </a:p>
                   </a:txBody>
@@ -9203,14 +9237,14 @@
                         </a:defRPr>
                       </a:pPr>
                       <a:r>
-                        <a:t>66.7%</a:t>
+                        <a:t>60.0%</a:t>
                       </a:r>
                     </a:p>
                   </a:txBody>
                   <a:tcPr/>
                 </a:tc>
               </a:tr>
-              <a:tr h="510540">
+              <a:tr h="437605">
                 <a:tc>
                   <a:txBody>
                     <a:bodyPr/>
@@ -9225,6 +9259,108 @@
                         </a:defRPr>
                       </a:pPr>
                       <a:r>
+                        <a:t>9월(평)</a:t>
+                      </a:r>
+                    </a:p>
+                  </a:txBody>
+                  <a:tcPr/>
+                </a:tc>
+                <a:tc>
+                  <a:txBody>
+                    <a:bodyPr/>
+                    <a:lstStyle/>
+                    <a:p>
+                      <a:pPr algn="ctr">
+                        <a:defRPr sz="800">
+                          <a:solidFill>
+                            <a:srgbClr val="374151"/>
+                          </a:solidFill>
+                          <a:latin typeface="Malgun Gothic"/>
+                        </a:defRPr>
+                      </a:pPr>
+                      <a:r>
+                        <a:t>4</a:t>
+                      </a:r>
+                    </a:p>
+                  </a:txBody>
+                  <a:tcPr/>
+                </a:tc>
+                <a:tc>
+                  <a:txBody>
+                    <a:bodyPr/>
+                    <a:lstStyle/>
+                    <a:p>
+                      <a:pPr algn="ctr">
+                        <a:defRPr sz="800">
+                          <a:solidFill>
+                            <a:srgbClr val="374151"/>
+                          </a:solidFill>
+                          <a:latin typeface="Malgun Gothic"/>
+                        </a:defRPr>
+                      </a:pPr>
+                      <a:r>
+                        <a:t>6.6</a:t>
+                      </a:r>
+                    </a:p>
+                  </a:txBody>
+                  <a:tcPr/>
+                </a:tc>
+                <a:tc>
+                  <a:txBody>
+                    <a:bodyPr/>
+                    <a:lstStyle/>
+                    <a:p>
+                      <a:pPr algn="ctr">
+                        <a:defRPr sz="800">
+                          <a:solidFill>
+                            <a:srgbClr val="374151"/>
+                          </a:solidFill>
+                          <a:latin typeface="Malgun Gothic"/>
+                        </a:defRPr>
+                      </a:pPr>
+                      <a:r>
+                        <a:t>11.4</a:t>
+                      </a:r>
+                    </a:p>
+                  </a:txBody>
+                  <a:tcPr/>
+                </a:tc>
+                <a:tc>
+                  <a:txBody>
+                    <a:bodyPr/>
+                    <a:lstStyle/>
+                    <a:p>
+                      <a:pPr algn="ctr">
+                        <a:defRPr sz="800">
+                          <a:solidFill>
+                            <a:srgbClr val="374151"/>
+                          </a:solidFill>
+                          <a:latin typeface="Malgun Gothic"/>
+                        </a:defRPr>
+                      </a:pPr>
+                      <a:r>
+                        <a:t>75.0%</a:t>
+                      </a:r>
+                    </a:p>
+                  </a:txBody>
+                  <a:tcPr/>
+                </a:tc>
+              </a:tr>
+              <a:tr h="437605">
+                <a:tc>
+                  <a:txBody>
+                    <a:bodyPr/>
+                    <a:lstStyle/>
+                    <a:p>
+                      <a:pPr algn="ctr">
+                        <a:defRPr sz="800">
+                          <a:solidFill>
+                            <a:srgbClr val="374151"/>
+                          </a:solidFill>
+                          <a:latin typeface="Malgun Gothic"/>
+                        </a:defRPr>
+                      </a:pPr>
+                      <a:r>
                         <a:t>10월</a:t>
                       </a:r>
                     </a:p>
@@ -9312,7 +9448,7 @@
                   <a:tcPr/>
                 </a:tc>
               </a:tr>
-              <a:tr h="510540">
+              <a:tr h="437610">
                 <a:tc>
                   <a:txBody>
                     <a:bodyPr/>
